--- a/entrega/QGate_oficial_v2.pptx
+++ b/entrega/QGate_oficial_v2.pptx
@@ -812,7 +812,7 @@
           <a:lstStyle/>
           <a:p>
             <a:r>
-              <a:t>QGate elige 3 vuelos, arma una pieza de 9 qubits con el resto fijo y la resuelve con QAOA. Con nuestra semilla llega a 340. Con 512 muestras hasta el azar resuelve piezas tan chicas, por eso medimos con 8: QAOA resuelve 59% de las piezas y el azar sobre los 27 estados de su espacio 29%. Pero el azar sobre las 6 permutaciones válidas llegaría a 78% y enumerar las 6 opciones, a 100%: QAOA concentra probabilidad respecto a su espacio de partida, pero en piezas de 3 vuelos aún no supera a esas alternativas. En 12 semillas llega a 340 en 4: el límite es la búsqueda.</a:t>
+              <a:t>QGate elige 3 vuelos, arma una pieza de 9 qubits con el resto fijo y la resuelve con QAOA. Con nuestra semilla llega a 340. Con 512 muestras hasta el azar resuelve piezas tan chicas, por eso medimos con 8: QAOA resuelve 59% de las piezas y el azar sobre los 27 estados de su espacio 29%. Pero el azar sobre las 6 permutaciones válidas llegaría a 78% y enumerar las 6 opciones, a 100%: QAOA concentra probabilidad respecto a su espacio de partida, pero en piezas de 3 vuelos aún no supera a esas alternativas. Con el solver exacto en cada vecindario, 4 de 12 semillas llegan a 340; el QAOA lo corrimos con la semilla 7: el límite es la búsqueda.</a:t>
             </a:r>
           </a:p>
         </p:txBody>
